--- a/data-eng/decks/w2d4s2.pptx
+++ b/data-eng/decks/w2d4s2.pptx
@@ -3099,7 +3099,7 @@
       <p:grpSpPr/>
       <p:sp>
         <p:nvSpPr>
-          <p:cNvPr id="2" name="Oval 1"/>
+          <p:cNvPr id="2" name="deckgen:decor"/>
           <p:cNvSpPr/>
           <p:nvPr/>
         </p:nvSpPr>
@@ -3129,7 +3129,7 @@
       </p:sp>
       <p:sp>
         <p:nvSpPr>
-          <p:cNvPr id="3" name="Oval 2"/>
+          <p:cNvPr id="3" name="deckgen:decor"/>
           <p:cNvSpPr/>
           <p:nvPr/>
         </p:nvSpPr>
@@ -3159,7 +3159,7 @@
       </p:sp>
       <p:sp>
         <p:nvSpPr>
-          <p:cNvPr id="4" name="Oval 3"/>
+          <p:cNvPr id="4" name="deckgen:decor"/>
           <p:cNvSpPr/>
           <p:nvPr/>
         </p:nvSpPr>
@@ -3189,7 +3189,7 @@
       </p:sp>
       <p:sp>
         <p:nvSpPr>
-          <p:cNvPr id="5" name="Rectangle 4"/>
+          <p:cNvPr id="5" name="deckgen:decor"/>
           <p:cNvSpPr/>
           <p:nvPr/>
         </p:nvSpPr>
@@ -3219,7 +3219,7 @@
       </p:sp>
       <p:sp>
         <p:nvSpPr>
-          <p:cNvPr id="6" name="Oval 5"/>
+          <p:cNvPr id="6" name="deckgen:decor"/>
           <p:cNvSpPr/>
           <p:nvPr/>
         </p:nvSpPr>
@@ -3249,7 +3249,7 @@
       </p:sp>
       <p:sp>
         <p:nvSpPr>
-          <p:cNvPr id="7" name="Oval 6"/>
+          <p:cNvPr id="7" name="deckgen:decor"/>
           <p:cNvSpPr/>
           <p:nvPr/>
         </p:nvSpPr>
@@ -3279,7 +3279,7 @@
       </p:sp>
       <p:sp>
         <p:nvSpPr>
-          <p:cNvPr id="8" name="Oval 7"/>
+          <p:cNvPr id="8" name="deckgen:decor"/>
           <p:cNvSpPr/>
           <p:nvPr/>
         </p:nvSpPr>
@@ -3309,7 +3309,7 @@
       </p:sp>
       <p:sp>
         <p:nvSpPr>
-          <p:cNvPr id="9" name="Oval 8"/>
+          <p:cNvPr id="9" name="deckgen:decor"/>
           <p:cNvSpPr/>
           <p:nvPr/>
         </p:nvSpPr>
@@ -3339,7 +3339,7 @@
       </p:sp>
       <p:sp>
         <p:nvSpPr>
-          <p:cNvPr id="10" name="Rectangle 9"/>
+          <p:cNvPr id="10" name="deckgen:decor"/>
           <p:cNvSpPr/>
           <p:nvPr/>
         </p:nvSpPr>
@@ -3599,7 +3599,7 @@
       <p:grpSpPr/>
       <p:sp>
         <p:nvSpPr>
-          <p:cNvPr id="2" name="Oval 1"/>
+          <p:cNvPr id="2" name="deckgen:decor"/>
           <p:cNvSpPr/>
           <p:nvPr/>
         </p:nvSpPr>
@@ -3629,7 +3629,7 @@
       </p:sp>
       <p:sp>
         <p:nvSpPr>
-          <p:cNvPr id="3" name="Oval 2"/>
+          <p:cNvPr id="3" name="deckgen:decor"/>
           <p:cNvSpPr/>
           <p:nvPr/>
         </p:nvSpPr>
@@ -3921,7 +3921,7 @@
                 <a:ea typeface="Pretendard"/>
                 <a:cs typeface="Pretendard"/>
               </a:rPr>
-              <a:t>customers → orders → order_items 순서로 생성</a:t>
+              <a:t>customers → orders → order_items 순으로 생성</a:t>
             </a:r>
           </a:p>
         </p:txBody>
@@ -4406,7 +4406,7 @@
       <p:grpSpPr/>
       <p:sp>
         <p:nvSpPr>
-          <p:cNvPr id="2" name="Oval 1"/>
+          <p:cNvPr id="2" name="deckgen:decor"/>
           <p:cNvSpPr/>
           <p:nvPr/>
         </p:nvSpPr>
@@ -4436,7 +4436,7 @@
       </p:sp>
       <p:sp>
         <p:nvSpPr>
-          <p:cNvPr id="3" name="Oval 2"/>
+          <p:cNvPr id="3" name="deckgen:decor"/>
           <p:cNvSpPr/>
           <p:nvPr/>
         </p:nvSpPr>
@@ -4466,7 +4466,7 @@
       </p:sp>
       <p:sp>
         <p:nvSpPr>
-          <p:cNvPr id="4" name="Oval 3"/>
+          <p:cNvPr id="4" name="deckgen:decor"/>
           <p:cNvSpPr/>
           <p:nvPr/>
         </p:nvSpPr>
@@ -5397,7 +5397,7 @@
       <p:grpSpPr/>
       <p:sp>
         <p:nvSpPr>
-          <p:cNvPr id="2" name="Oval 1"/>
+          <p:cNvPr id="2" name="deckgen:decor"/>
           <p:cNvSpPr/>
           <p:nvPr/>
         </p:nvSpPr>
@@ -5427,7 +5427,7 @@
       </p:sp>
       <p:sp>
         <p:nvSpPr>
-          <p:cNvPr id="3" name="Oval 2"/>
+          <p:cNvPr id="3" name="deckgen:decor"/>
           <p:cNvSpPr/>
           <p:nvPr/>
         </p:nvSpPr>
@@ -5457,7 +5457,7 @@
       </p:sp>
       <p:sp>
         <p:nvSpPr>
-          <p:cNvPr id="4" name="Oval 3"/>
+          <p:cNvPr id="4" name="deckgen:decor"/>
           <p:cNvSpPr/>
           <p:nvPr/>
         </p:nvSpPr>
@@ -5633,7 +5633,7 @@
                 <a:ea typeface="Pretendard"/>
                 <a:cs typeface="Pretendard"/>
               </a:rPr>
-              <a:t>docker start de-mysql 뒤 docker exec -it de-mysql mysql -uroot -pdataeng123 shop 으로 접속합니다</a:t>
+              <a:t>실습점검의 mysql&gt; 창에서 이어서 합니다 — 닫았다면 -e LANG=C.UTF-8 을 붙여 다시 접속</a:t>
             </a:r>
           </a:p>
         </p:txBody>
@@ -6426,7 +6426,7 @@
       <p:grpSpPr/>
       <p:sp>
         <p:nvSpPr>
-          <p:cNvPr id="2" name="Oval 1"/>
+          <p:cNvPr id="2" name="deckgen:decor"/>
           <p:cNvSpPr/>
           <p:nvPr/>
         </p:nvSpPr>
@@ -6456,7 +6456,7 @@
       </p:sp>
       <p:sp>
         <p:nvSpPr>
-          <p:cNvPr id="3" name="Oval 2"/>
+          <p:cNvPr id="3" name="deckgen:decor"/>
           <p:cNvSpPr/>
           <p:nvPr/>
         </p:nvSpPr>
@@ -6486,7 +6486,7 @@
       </p:sp>
       <p:sp>
         <p:nvSpPr>
-          <p:cNvPr id="4" name="Oval 3"/>
+          <p:cNvPr id="4" name="deckgen:decor"/>
           <p:cNvSpPr/>
           <p:nvPr/>
         </p:nvSpPr>
@@ -8320,7 +8320,7 @@
       <p:grpSpPr/>
       <p:sp>
         <p:nvSpPr>
-          <p:cNvPr id="2" name="Oval 1"/>
+          <p:cNvPr id="2" name="deckgen:decor"/>
           <p:cNvSpPr/>
           <p:nvPr/>
         </p:nvSpPr>
@@ -8350,7 +8350,7 @@
       </p:sp>
       <p:sp>
         <p:nvSpPr>
-          <p:cNvPr id="3" name="Oval 2"/>
+          <p:cNvPr id="3" name="deckgen:decor"/>
           <p:cNvSpPr/>
           <p:nvPr/>
         </p:nvSpPr>
@@ -8380,7 +8380,7 @@
       </p:sp>
       <p:sp>
         <p:nvSpPr>
-          <p:cNvPr id="4" name="Oval 3"/>
+          <p:cNvPr id="4" name="deckgen:decor"/>
           <p:cNvSpPr/>
           <p:nvPr/>
         </p:nvSpPr>
@@ -9173,7 +9173,7 @@
                 <a:ea typeface="Pretendard"/>
                 <a:cs typeface="Pretendard"/>
               </a:rPr>
-              <a:t>「무선마우스」까지 잘못 잡힌다</a:t>
+              <a:t>지금은 2 — 「마우스패드」가 들어오면 그것도 센다</a:t>
             </a:r>
           </a:p>
         </p:txBody>
@@ -9381,7 +9381,7 @@
       <p:grpSpPr/>
       <p:sp>
         <p:nvSpPr>
-          <p:cNvPr id="2" name="Oval 1"/>
+          <p:cNvPr id="2" name="deckgen:decor"/>
           <p:cNvSpPr/>
           <p:nvPr/>
         </p:nvSpPr>
@@ -9411,7 +9411,7 @@
       </p:sp>
       <p:sp>
         <p:nvSpPr>
-          <p:cNvPr id="3" name="Oval 2"/>
+          <p:cNvPr id="3" name="deckgen:decor"/>
           <p:cNvSpPr/>
           <p:nvPr/>
         </p:nvSpPr>
@@ -9441,7 +9441,7 @@
       </p:sp>
       <p:sp>
         <p:nvSpPr>
-          <p:cNvPr id="4" name="Oval 3"/>
+          <p:cNvPr id="4" name="deckgen:decor"/>
           <p:cNvSpPr/>
           <p:nvPr/>
         </p:nvSpPr>
@@ -10696,7 +10696,232 @@
       </p:sp>
       <p:sp>
         <p:nvSpPr>
-          <p:cNvPr id="38" name="TextBox 37"/>
+          <p:cNvPr id="38" name="Rounded Rectangle 37"/>
+          <p:cNvSpPr/>
+          <p:nvPr/>
+        </p:nvSpPr>
+        <p:spPr>
+          <a:xfrm>
+            <a:off x="1143000" y="6343650"/>
+            <a:ext cx="6042660" cy="647700"/>
+          </a:xfrm>
+          <a:prstGeom prst="roundRect">
+            <a:avLst>
+              <a:gd name="adj" fmla="val 5882"/>
+            </a:avLst>
+          </a:prstGeom>
+          <a:solidFill>
+            <a:srgbClr val="EDF3FD"/>
+          </a:solidFill>
+          <a:ln w="9525">
+            <a:solidFill>
+              <a:srgbClr val="BFD3F5"/>
+            </a:solidFill>
+          </a:ln>
+          <a:effectLst/>
+        </p:spPr>
+        <p:txBody>
+          <a:bodyPr rtlCol="0" anchor="ctr" wrap="square"/>
+          <a:lstStyle/>
+          <a:p>
+            <a:pPr algn="ctr"/>
+          </a:p>
+        </p:txBody>
+      </p:sp>
+      <p:sp>
+        <p:nvSpPr>
+          <p:cNvPr id="39" name="TextBox 38"/>
+          <p:cNvSpPr txBox="1"/>
+          <p:nvPr/>
+        </p:nvSpPr>
+        <p:spPr>
+          <a:xfrm>
+            <a:off x="1238250" y="6343650"/>
+            <a:ext cx="5852160" cy="647700"/>
+          </a:xfrm>
+          <a:prstGeom prst="rect">
+            <a:avLst/>
+          </a:prstGeom>
+          <a:noFill/>
+        </p:spPr>
+        <p:txBody>
+          <a:bodyPr wrap="square" lIns="0" rIns="0" tIns="0" bIns="0" anchor="ctr">
+            <a:spAutoFit/>
+          </a:bodyPr>
+          <a:lstStyle/>
+          <a:p>
+            <a:pPr algn="l">
+              <a:lnSpc>
+                <a:spcPct val="115000"/>
+              </a:lnSpc>
+            </a:pPr>
+            <a:r>
+              <a:rPr sz="1875" b="1">
+                <a:solidFill>
+                  <a:srgbClr val="0D2B5E"/>
+                </a:solidFill>
+                <a:latin typeface="Pretendard"/>
+                <a:ea typeface="Pretendard"/>
+                <a:cs typeface="Pretendard"/>
+              </a:rPr>
+              <a:t>total_price</a:t>
+            </a:r>
+          </a:p>
+        </p:txBody>
+      </p:sp>
+      <p:sp>
+        <p:nvSpPr>
+          <p:cNvPr id="40" name="Rounded Rectangle 39"/>
+          <p:cNvSpPr/>
+          <p:nvPr/>
+        </p:nvSpPr>
+        <p:spPr>
+          <a:xfrm>
+            <a:off x="7223760" y="6343650"/>
+            <a:ext cx="5082540" cy="647700"/>
+          </a:xfrm>
+          <a:prstGeom prst="roundRect">
+            <a:avLst>
+              <a:gd name="adj" fmla="val 5882"/>
+            </a:avLst>
+          </a:prstGeom>
+          <a:solidFill>
+            <a:srgbClr val="FAFBFD"/>
+          </a:solidFill>
+          <a:ln w="9525">
+            <a:solidFill>
+              <a:srgbClr val="DCE1E8"/>
+            </a:solidFill>
+          </a:ln>
+          <a:effectLst/>
+        </p:spPr>
+        <p:txBody>
+          <a:bodyPr rtlCol="0" anchor="ctr" wrap="square"/>
+          <a:lstStyle/>
+          <a:p>
+            <a:pPr algn="ctr"/>
+          </a:p>
+        </p:txBody>
+      </p:sp>
+      <p:sp>
+        <p:nvSpPr>
+          <p:cNvPr id="41" name="TextBox 40"/>
+          <p:cNvSpPr txBox="1"/>
+          <p:nvPr/>
+        </p:nvSpPr>
+        <p:spPr>
+          <a:xfrm>
+            <a:off x="7319010" y="6343650"/>
+            <a:ext cx="4892040" cy="647700"/>
+          </a:xfrm>
+          <a:prstGeom prst="rect">
+            <a:avLst/>
+          </a:prstGeom>
+          <a:noFill/>
+        </p:spPr>
+        <p:txBody>
+          <a:bodyPr wrap="square" lIns="0" rIns="0" tIns="0" bIns="0" anchor="ctr">
+            <a:spAutoFit/>
+          </a:bodyPr>
+          <a:lstStyle/>
+          <a:p>
+            <a:pPr algn="ctr">
+              <a:lnSpc>
+                <a:spcPct val="115000"/>
+              </a:lnSpc>
+            </a:pPr>
+            <a:r>
+              <a:rPr sz="1875" b="0">
+                <a:solidFill>
+                  <a:srgbClr val="3D3D3D"/>
+                </a:solidFill>
+                <a:latin typeface="Pretendard"/>
+                <a:ea typeface="Pretendard"/>
+                <a:cs typeface="Pretendard"/>
+              </a:rPr>
+              <a:t>계산하면 나오는 값</a:t>
+            </a:r>
+          </a:p>
+        </p:txBody>
+      </p:sp>
+      <p:sp>
+        <p:nvSpPr>
+          <p:cNvPr id="42" name="Rounded Rectangle 41"/>
+          <p:cNvSpPr/>
+          <p:nvPr/>
+        </p:nvSpPr>
+        <p:spPr>
+          <a:xfrm>
+            <a:off x="12344400" y="6343650"/>
+            <a:ext cx="4800600" cy="647700"/>
+          </a:xfrm>
+          <a:prstGeom prst="roundRect">
+            <a:avLst>
+              <a:gd name="adj" fmla="val 5882"/>
+            </a:avLst>
+          </a:prstGeom>
+          <a:solidFill>
+            <a:srgbClr val="FAFBFD"/>
+          </a:solidFill>
+          <a:ln w="9525">
+            <a:solidFill>
+              <a:srgbClr val="DCE1E8"/>
+            </a:solidFill>
+          </a:ln>
+          <a:effectLst/>
+        </p:spPr>
+        <p:txBody>
+          <a:bodyPr rtlCol="0" anchor="ctr" wrap="square"/>
+          <a:lstStyle/>
+          <a:p>
+            <a:pPr algn="ctr"/>
+          </a:p>
+        </p:txBody>
+      </p:sp>
+      <p:sp>
+        <p:nvSpPr>
+          <p:cNvPr id="43" name="TextBox 42"/>
+          <p:cNvSpPr txBox="1"/>
+          <p:nvPr/>
+        </p:nvSpPr>
+        <p:spPr>
+          <a:xfrm>
+            <a:off x="12439650" y="6343650"/>
+            <a:ext cx="4610100" cy="647700"/>
+          </a:xfrm>
+          <a:prstGeom prst="rect">
+            <a:avLst/>
+          </a:prstGeom>
+          <a:noFill/>
+        </p:spPr>
+        <p:txBody>
+          <a:bodyPr wrap="square" lIns="0" rIns="0" tIns="0" bIns="0" anchor="ctr">
+            <a:spAutoFit/>
+          </a:bodyPr>
+          <a:lstStyle/>
+          <a:p>
+            <a:pPr algn="ctr">
+              <a:lnSpc>
+                <a:spcPct val="115000"/>
+              </a:lnSpc>
+            </a:pPr>
+            <a:r>
+              <a:rPr sz="1875" b="0">
+                <a:solidFill>
+                  <a:srgbClr val="3D3D3D"/>
+                </a:solidFill>
+                <a:latin typeface="Pretendard"/>
+                <a:ea typeface="Pretendard"/>
+                <a:cs typeface="Pretendard"/>
+              </a:rPr>
+              <a:t>두지 않는다</a:t>
+            </a:r>
+          </a:p>
+        </p:txBody>
+      </p:sp>
+      <p:sp>
+        <p:nvSpPr>
+          <p:cNvPr id="44" name="TextBox 43"/>
           <p:cNvSpPr txBox="1"/>
           <p:nvPr/>
         </p:nvSpPr>
@@ -10737,7 +10962,7 @@
       </p:sp>
       <p:sp>
         <p:nvSpPr>
-          <p:cNvPr id="39" name="Rectangle 38"/>
+          <p:cNvPr id="45" name="Rectangle 44"/>
           <p:cNvSpPr/>
           <p:nvPr/>
         </p:nvSpPr>
@@ -10767,7 +10992,7 @@
       </p:sp>
       <p:sp>
         <p:nvSpPr>
-          <p:cNvPr id="40" name="TextBox 39"/>
+          <p:cNvPr id="46" name="TextBox 45"/>
           <p:cNvSpPr txBox="1"/>
           <p:nvPr/>
         </p:nvSpPr>
@@ -10808,7 +11033,7 @@
       </p:sp>
       <p:sp>
         <p:nvSpPr>
-          <p:cNvPr id="41" name="TextBox 40"/>
+          <p:cNvPr id="47" name="TextBox 46"/>
           <p:cNvSpPr txBox="1"/>
           <p:nvPr/>
         </p:nvSpPr>
@@ -10867,7 +11092,7 @@
       <p:grpSpPr/>
       <p:sp>
         <p:nvSpPr>
-          <p:cNvPr id="2" name="Oval 1"/>
+          <p:cNvPr id="2" name="deckgen:decor"/>
           <p:cNvSpPr/>
           <p:nvPr/>
         </p:nvSpPr>
@@ -10897,7 +11122,7 @@
       </p:sp>
       <p:sp>
         <p:nvSpPr>
-          <p:cNvPr id="3" name="Oval 2"/>
+          <p:cNvPr id="3" name="deckgen:decor"/>
           <p:cNvSpPr/>
           <p:nvPr/>
         </p:nvSpPr>
@@ -10927,7 +11152,7 @@
       </p:sp>
       <p:sp>
         <p:nvSpPr>
-          <p:cNvPr id="4" name="Oval 3"/>
+          <p:cNvPr id="4" name="deckgen:decor"/>
           <p:cNvSpPr/>
           <p:nvPr/>
         </p:nvSpPr>
@@ -12018,7 +12243,7 @@
       <p:grpSpPr/>
       <p:sp>
         <p:nvSpPr>
-          <p:cNvPr id="2" name="Oval 1"/>
+          <p:cNvPr id="2" name="deckgen:decor"/>
           <p:cNvSpPr/>
           <p:nvPr/>
         </p:nvSpPr>
@@ -12048,7 +12273,7 @@
       </p:sp>
       <p:sp>
         <p:nvSpPr>
-          <p:cNvPr id="3" name="Oval 2"/>
+          <p:cNvPr id="3" name="deckgen:decor"/>
           <p:cNvSpPr/>
           <p:nvPr/>
         </p:nvSpPr>
@@ -12078,7 +12303,7 @@
       </p:sp>
       <p:sp>
         <p:nvSpPr>
-          <p:cNvPr id="4" name="Oval 3"/>
+          <p:cNvPr id="4" name="deckgen:decor"/>
           <p:cNvSpPr/>
           <p:nvPr/>
         </p:nvSpPr>
@@ -12254,7 +12479,7 @@
                 <a:ea typeface="Pretendard"/>
                 <a:cs typeface="Pretendard"/>
               </a:rPr>
-              <a:t>MySQL Workbench 의 EER Diagram 을 쓰거나, 종이·화이트보드에 그린 뒤 사진으로 남깁니다</a:t>
+              <a:t>종이에 그려 사진으로, 또는 그림 도구·Workbench 의 EER Diagram — 그림은 2-5 설계서에 넣습니다</a:t>
             </a:r>
           </a:p>
         </p:txBody>
@@ -13047,7 +13272,7 @@
       <p:grpSpPr/>
       <p:sp>
         <p:nvSpPr>
-          <p:cNvPr id="2" name="Oval 1"/>
+          <p:cNvPr id="2" name="deckgen:decor"/>
           <p:cNvSpPr/>
           <p:nvPr/>
         </p:nvSpPr>
@@ -13077,7 +13302,7 @@
       </p:sp>
       <p:sp>
         <p:nvSpPr>
-          <p:cNvPr id="3" name="Oval 2"/>
+          <p:cNvPr id="3" name="deckgen:decor"/>
           <p:cNvSpPr/>
           <p:nvPr/>
         </p:nvSpPr>
@@ -13107,7 +13332,7 @@
       </p:sp>
       <p:sp>
         <p:nvSpPr>
-          <p:cNvPr id="4" name="Oval 3"/>
+          <p:cNvPr id="4" name="deckgen:decor"/>
           <p:cNvSpPr/>
           <p:nvPr/>
         </p:nvSpPr>
